--- a/writing/decks/04-write-for-zero-domain-knowledge.pptx
+++ b/writing/decks/04-write-for-zero-domain-knowledge.pptx
@@ -3177,7 +3177,7 @@
                 </a:solidFill>
                 <a:latin typeface="Consolas"/>
               </a:rPr>
-              <a:t>RATCHET · PART 4 OF 5</a:t>
+              <a:t>RATCHET · PART 4 OF 6</a:t>
             </a:r>
           </a:p>
         </p:txBody>
@@ -3289,7 +3289,7 @@
                 </a:solidFill>
                 <a:latin typeface="Calibri"/>
               </a:rPr>
-              <a:t>Part 4 of 5. The single hardest skill in the whole system: removing every gap a small model could misinterpret, before it ever gets the chance to guess.</a:t>
+              <a:t>Part 4 of 6. The single hardest skill in the whole system: removing every gap a small model could misinterpret, before it ever gets the chance to guess.</a:t>
             </a:r>
           </a:p>
         </p:txBody>
@@ -3479,6 +3479,50 @@
         <p:spPr>
           <a:xfrm>
             <a:off x="2148839" y="6263640"/>
+            <a:ext cx="146304" cy="146304"/>
+          </a:xfrm>
+          <a:prstGeom prst="ellipse">
+            <a:avLst/>
+          </a:prstGeom>
+          <a:solidFill>
+            <a:srgbClr val="3A3E44"/>
+          </a:solidFill>
+          <a:ln>
+            <a:noFill/>
+          </a:ln>
+          <a:effectLst/>
+        </p:spPr>
+        <p:style>
+          <a:lnRef idx="1">
+            <a:schemeClr val="accent1"/>
+          </a:lnRef>
+          <a:fillRef idx="3">
+            <a:schemeClr val="accent1"/>
+          </a:fillRef>
+          <a:effectRef idx="2">
+            <a:schemeClr val="accent1"/>
+          </a:effectRef>
+          <a:fontRef idx="minor">
+            <a:schemeClr val="lt1"/>
+          </a:fontRef>
+        </p:style>
+        <p:txBody>
+          <a:bodyPr rtlCol="0" anchor="ctr"/>
+          <a:lstStyle/>
+          <a:p>
+            <a:pPr algn="ctr"/>
+          </a:p>
+        </p:txBody>
+      </p:sp>
+      <p:sp>
+        <p:nvSpPr>
+          <p:cNvPr id="12" name="Oval 11"/>
+          <p:cNvSpPr/>
+          <p:nvPr/>
+        </p:nvSpPr>
+        <p:spPr>
+          <a:xfrm>
+            <a:off x="2468880" y="6263640"/>
             <a:ext cx="146304" cy="146304"/>
           </a:xfrm>
           <a:prstGeom prst="ellipse">
@@ -3849,7 +3893,7 @@
                 </a:solidFill>
                 <a:latin typeface="Consolas"/>
               </a:rPr>
-              <a:t>RATCHET · PART 4/5 · ZERO DOMAIN KNOWLEDGE</a:t>
+              <a:t>RATCHET · PART 4/6 · ZERO DOMAIN KNOWLEDGE</a:t>
             </a:r>
           </a:p>
           <a:p/>
@@ -4232,7 +4276,7 @@
                 </a:solidFill>
                 <a:latin typeface="Consolas"/>
               </a:rPr>
-              <a:t>RATCHET · PART 4/5 · ZERO DOMAIN KNOWLEDGE</a:t>
+              <a:t>RATCHET · PART 4/6 · ZERO DOMAIN KNOWLEDGE</a:t>
             </a:r>
           </a:p>
           <a:p/>
@@ -4643,7 +4687,7 @@
                 </a:solidFill>
                 <a:latin typeface="Consolas"/>
               </a:rPr>
-              <a:t>RATCHET · PART 4/5 · ZERO DOMAIN KNOWLEDGE</a:t>
+              <a:t>RATCHET · PART 4/6 · ZERO DOMAIN KNOWLEDGE</a:t>
             </a:r>
           </a:p>
           <a:p/>
@@ -4967,7 +5011,7 @@
                 </a:solidFill>
                 <a:latin typeface="Consolas"/>
               </a:rPr>
-              <a:t>RATCHET · PART 4/5 · ZERO DOMAIN KNOWLEDGE</a:t>
+              <a:t>RATCHET · PART 4/6 · ZERO DOMAIN KNOWLEDGE</a:t>
             </a:r>
           </a:p>
           <a:p/>
@@ -5350,7 +5394,7 @@
                 </a:solidFill>
                 <a:latin typeface="Consolas"/>
               </a:rPr>
-              <a:t>RATCHET · PART 4/5 · ZERO DOMAIN KNOWLEDGE</a:t>
+              <a:t>RATCHET · PART 4/6 · ZERO DOMAIN KNOWLEDGE</a:t>
             </a:r>
           </a:p>
           <a:p/>
@@ -5674,7 +5718,7 @@
                 </a:solidFill>
                 <a:latin typeface="Consolas"/>
               </a:rPr>
-              <a:t>RATCHET · PART 4/5 · ZERO DOMAIN KNOWLEDGE</a:t>
+              <a:t>RATCHET · PART 4/6 · ZERO DOMAIN KNOWLEDGE</a:t>
             </a:r>
           </a:p>
           <a:p/>
@@ -6057,7 +6101,7 @@
                 </a:solidFill>
                 <a:latin typeface="Consolas"/>
               </a:rPr>
-              <a:t>RATCHET · PART 4/5 · ZERO DOMAIN KNOWLEDGE</a:t>
+              <a:t>RATCHET · PART 4/6 · ZERO DOMAIN KNOWLEDGE</a:t>
             </a:r>
           </a:p>
           <a:p/>
@@ -6345,7 +6389,7 @@
                 </a:solidFill>
                 <a:latin typeface="Calibri"/>
               </a:rPr>
-              <a:t>The Burn-In — a full account of the deliberate stress-test, what it found, and what surprised even the people running it.</a:t>
+              <a:t>Draft, Check, Sign Off — the workflow that turns rough prose into a design doc the pipeline is allowed to trust.</a:t>
             </a:r>
           </a:p>
         </p:txBody>
@@ -6379,7 +6423,7 @@
                 </a:solidFill>
                 <a:latin typeface="Consolas"/>
               </a:rPr>
-              <a:t>RATCHET · PART 4/5 · ZERO DOMAIN KNOWLEDGE</a:t>
+              <a:t>RATCHET · PART 4/6 · ZERO DOMAIN KNOWLEDGE</a:t>
             </a:r>
           </a:p>
         </p:txBody>
@@ -6667,7 +6711,7 @@
                 </a:solidFill>
                 <a:latin typeface="Consolas"/>
               </a:rPr>
-              <a:t>RATCHET · PART 4/5 · ZERO DOMAIN KNOWLEDGE</a:t>
+              <a:t>RATCHET · PART 4/6 · ZERO DOMAIN KNOWLEDGE</a:t>
             </a:r>
           </a:p>
           <a:p/>
@@ -7068,7 +7112,7 @@
                 </a:solidFill>
                 <a:latin typeface="Consolas"/>
               </a:rPr>
-              <a:t>RATCHET · PART 4/5 · ZERO DOMAIN KNOWLEDGE</a:t>
+              <a:t>RATCHET · PART 4/6 · ZERO DOMAIN KNOWLEDGE</a:t>
             </a:r>
           </a:p>
           <a:p/>
@@ -7451,7 +7495,7 @@
                 </a:solidFill>
                 <a:latin typeface="Consolas"/>
               </a:rPr>
-              <a:t>RATCHET · PART 4/5 · ZERO DOMAIN KNOWLEDGE</a:t>
+              <a:t>RATCHET · PART 4/6 · ZERO DOMAIN KNOWLEDGE</a:t>
             </a:r>
           </a:p>
           <a:p/>
@@ -7775,7 +7819,7 @@
                 </a:solidFill>
                 <a:latin typeface="Consolas"/>
               </a:rPr>
-              <a:t>RATCHET · PART 4/5 · ZERO DOMAIN KNOWLEDGE</a:t>
+              <a:t>RATCHET · PART 4/6 · ZERO DOMAIN KNOWLEDGE</a:t>
             </a:r>
           </a:p>
           <a:p/>
@@ -8158,7 +8202,7 @@
                 </a:solidFill>
                 <a:latin typeface="Consolas"/>
               </a:rPr>
-              <a:t>RATCHET · PART 4/5 · ZERO DOMAIN KNOWLEDGE</a:t>
+              <a:t>RATCHET · PART 4/6 · ZERO DOMAIN KNOWLEDGE</a:t>
             </a:r>
           </a:p>
           <a:p/>
@@ -8482,7 +8526,7 @@
                 </a:solidFill>
                 <a:latin typeface="Consolas"/>
               </a:rPr>
-              <a:t>RATCHET · PART 4/5 · ZERO DOMAIN KNOWLEDGE</a:t>
+              <a:t>RATCHET · PART 4/6 · ZERO DOMAIN KNOWLEDGE</a:t>
             </a:r>
           </a:p>
           <a:p/>
@@ -8865,7 +8909,7 @@
                 </a:solidFill>
                 <a:latin typeface="Consolas"/>
               </a:rPr>
-              <a:t>RATCHET · PART 4/5 · ZERO DOMAIN KNOWLEDGE</a:t>
+              <a:t>RATCHET · PART 4/6 · ZERO DOMAIN KNOWLEDGE</a:t>
             </a:r>
           </a:p>
           <a:p/>
@@ -9275,7 +9319,7 @@
                 </a:solidFill>
                 <a:latin typeface="Consolas"/>
               </a:rPr>
-              <a:t>RATCHET · PART 4/5 · ZERO DOMAIN KNOWLEDGE</a:t>
+              <a:t>RATCHET · PART 4/6 · ZERO DOMAIN KNOWLEDGE</a:t>
             </a:r>
           </a:p>
           <a:p/>

--- a/writing/decks/04-write-for-zero-domain-knowledge.pptx
+++ b/writing/decks/04-write-for-zero-domain-knowledge.pptx
@@ -7003,7 +7003,7 @@
                 </a:solidFill>
                 <a:latin typeface="Calibri"/>
               </a:rPr>
-              <a:t>Geometry &amp; arithmetic </a:t>
+              <a:t>Geometry (1) &amp; arithmetic (2) </a:t>
             </a:r>
             <a:r>
               <a:rPr sz="1800" b="0" i="0">
@@ -7040,7 +7040,7 @@
                 </a:solidFill>
                 <a:latin typeface="Calibri"/>
               </a:rPr>
-              <a:t>Ownership </a:t>
+              <a:t>Ownership (3) </a:t>
             </a:r>
             <a:r>
               <a:rPr sz="1800" b="0" i="0">
@@ -7279,7 +7279,7 @@
                 </a:solidFill>
                 <a:latin typeface="Consolas"/>
               </a:rPr>
-              <a:t>THE STICKIEST CLASS</a:t>
+              <a:t>THE STICKIEST FAILURE SHAPE</a:t>
             </a:r>
           </a:p>
         </p:txBody>
@@ -7389,7 +7389,7 @@
               </a:spcAft>
             </a:pPr>
             <a:r>
-              <a:rPr sz="1800" b="1" i="0">
+              <a:rPr sz="1700" b="1" i="0">
                 <a:solidFill>
                   <a:srgbClr val="3D6D7E"/>
                 </a:solidFill>
@@ -7398,13 +7398,13 @@
               <a:t>—  </a:t>
             </a:r>
             <a:r>
-              <a:rPr sz="1800" b="0" i="0">
+              <a:rPr sz="1700" b="0" i="0">
                 <a:solidFill>
                   <a:srgbClr val="1C1E22"/>
                 </a:solidFill>
                 <a:latin typeface="Calibri"/>
               </a:rPr>
-              <a:t>A VM's AST nodes were shown as value literals throughout. The scaffold's interface was satisfied by both a value and a pointer — nothing forced either choice.</a:t>
+              <a:t>Not itself one of the eighteen numbered classes — it needed a different kind of check than any of them, which is exactly why it's worth telling as a story.</a:t>
             </a:r>
           </a:p>
           <a:p>
@@ -7417,7 +7417,7 @@
               </a:spcAft>
             </a:pPr>
             <a:r>
-              <a:rPr sz="1800" b="1" i="0">
+              <a:rPr sz="1700" b="1" i="0">
                 <a:solidFill>
                   <a:srgbClr val="3D6D7E"/>
                 </a:solidFill>
@@ -7426,13 +7426,13 @@
               <a:t>—  </a:t>
             </a:r>
             <a:r>
-              <a:rPr sz="1800" b="0" i="0">
+              <a:rPr sz="1700" b="0" i="0">
                 <a:solidFill>
                   <a:srgbClr val="1C1E22"/>
                 </a:solidFill>
                 <a:latin typeface="Calibri"/>
               </a:rPr>
-              <a:t>One bead: the parser picked pointers, the test (same doc) picked values. Days later, a different bead hit the identical defect independently.</a:t>
+              <a:t>A VM's AST nodes were shown as value literals throughout. The scaffold's interface was satisfied by both a value and a pointer — nothing forced either choice.</a:t>
             </a:r>
           </a:p>
           <a:p>
@@ -7445,7 +7445,7 @@
               </a:spcAft>
             </a:pPr>
             <a:r>
-              <a:rPr sz="1800" b="1" i="0">
+              <a:rPr sz="1700" b="1" i="0">
                 <a:solidFill>
                   <a:srgbClr val="3D6D7E"/>
                 </a:solidFill>
@@ -7454,13 +7454,13 @@
               <a:t>—  </a:t>
             </a:r>
             <a:r>
-              <a:rPr sz="1800" b="0" i="0">
+              <a:rPr sz="1700" b="0" i="0">
                 <a:solidFill>
                   <a:srgbClr val="1C1E22"/>
                 </a:solidFill>
                 <a:latin typeface="Calibri"/>
               </a:rPr>
-              <a:t>Two independent beads, two independent models, one un-pinned decision.</a:t>
+              <a:t>One bead: the parser picked pointers, the test (same doc) picked values. Days later, a different bead hit the identical defect independently.</a:t>
             </a:r>
           </a:p>
         </p:txBody>
@@ -7662,7 +7662,7 @@
                 </a:solidFill>
                 <a:latin typeface="Consolas"/>
               </a:rPr>
-              <a:t>THE STICKIEST CLASS — CONT.</a:t>
+              <a:t>THE STICKIEST FAILURE SHAPE — CONT.</a:t>
             </a:r>
           </a:p>
         </p:txBody>
@@ -7784,7 +7784,7 @@
                 </a:solidFill>
                 <a:latin typeface="Calibri"/>
               </a:rPr>
-              <a:t>Nobody wrote it carelessly — the ambiguity in the original spec was load-bearing enough that a deliberately-careful reference implementation reproduced it anyway. The fix wasn't "be more careful" — it was a mechanical check flagging any shared type crossing a bead boundary with no explicit pointer-or-value statement.</a:t>
+              <a:t>Nobody wrote it carelessly — the ambiguity in the original spec was load-bearing enough that a deliberately-careful reference implementation reproduced it anyway. The fix wasn't "be more careful" — it was a dedicated mechanical check (construction-form), outside the eighteen-class catalogue, flagging any shared type crossing a bead boundary with no explicit pointer-or-value statement.</a:t>
             </a:r>
           </a:p>
         </p:txBody>
@@ -7986,7 +7986,7 @@
                 </a:solidFill>
                 <a:latin typeface="Consolas"/>
               </a:rPr>
-              <a:t>THE SHARPEST FINDING</a:t>
+              <a:t>CLASS 17 — THE SHARPEST FINDING</a:t>
             </a:r>
           </a:p>
         </p:txBody>
@@ -8693,7 +8693,7 @@
                 </a:solidFill>
                 <a:latin typeface="Consolas"/>
               </a:rPr>
-              <a:t>NEWEST ADDITION</a:t>
+              <a:t>CLASS 18 — NEWEST ADDITION</a:t>
             </a:r>
           </a:p>
         </p:txBody>
